--- a/modulo-02/02.04 - Usando Code Pushdown no ABAP SQL/02.04_Code_pushdown_no_ABAP_SQL.pptx
+++ b/modulo-02/02.04 - Usando Code Pushdown no ABAP SQL/02.04_Code_pushdown_no_ABAP_SQL.pptx
@@ -1728,7 +1728,7 @@
                   <a:srgbClr val="8FA3C7"/>
                 </a:solidFill>
               </a:rPr>
-              <a:t>ABAP Moderno · Módulo 04 — Programação ABAP Intermediária  ·  Aula 4 de 9 — Code pushdown no SQL</a:t>
+              <a:t>ABAP Moderno · Módulo 02 — Programação ABAP Intermediária  ·  Aula 4 de 9 — Code pushdown no SQL</a:t>
             </a:r>
             <a:endParaRPr lang="en-US" sz="900" dirty="0"/>
           </a:p>
@@ -1874,7 +1874,7 @@
                   <a:srgbClr val="556B82"/>
                 </a:solidFill>
               </a:rPr>
-              <a:t>ABAP Moderno · Módulo 04 — Programação ABAP Intermediária  ·  Aula 4 de 9 — Code pushdown no SQL</a:t>
+              <a:t>ABAP Moderno · Módulo 02 — Programação ABAP Intermediária  ·  Aula 4 de 9 — Code pushdown no SQL</a:t>
             </a:r>
             <a:endParaRPr lang="en-US" sz="900" dirty="0"/>
           </a:p>
@@ -2305,7 +2305,7 @@
                   <a:srgbClr val="89D1FF"/>
                 </a:solidFill>
               </a:rPr>
-              <a:t>MÓDULO 04 · AULA 04 DE 09</a:t>
+              <a:t>MÓDULO 02 · AULA 04 DE 09</a:t>
             </a:r>
             <a:endParaRPr lang="en-US" sz="1400" dirty="0"/>
           </a:p>
@@ -2691,7 +2691,7 @@
                   <a:srgbClr val="8FA3C7"/>
                 </a:solidFill>
               </a:rPr>
-              <a:t>ABAP Moderno · Módulo 04 — Programação ABAP Intermediária · Design System SAP Horizon</a:t>
+              <a:t>ABAP Moderno · Módulo 02 — Programação ABAP Intermediária · Design System SAP Horizon</a:t>
             </a:r>
             <a:endParaRPr lang="en-US" sz="1100" dirty="0"/>
           </a:p>
@@ -2798,7 +2798,7 @@
                   <a:srgbClr val="89D1FF"/>
                 </a:solidFill>
               </a:rPr>
-              <a:t>AULA 04.04 · SEÇÃO 3</a:t>
+              <a:t>AULA 02.04 · SEÇÃO 3</a:t>
             </a:r>
             <a:endParaRPr lang="en-US" sz="1300" dirty="0"/>
           </a:p>
@@ -3273,7 +3273,7 @@
                   <a:srgbClr val="1D2D3E"/>
                 </a:solidFill>
               </a:rPr>
-              <a:t>Totais por companhia, filtrados e ordenados</a:t>
+              <a:t>Totais por status do pedido, filtrados e ordenados</a:t>
             </a:r>
             <a:endParaRPr lang="en-US" sz="2800" dirty="0"/>
           </a:p>
@@ -3337,7 +3337,7 @@
         <p:spPr>
           <a:xfrm>
             <a:off x="640080" y="1700784"/>
-            <a:ext cx="1997964" cy="292608"/>
+            <a:ext cx="2697480" cy="292608"/>
           </a:xfrm>
           <a:prstGeom prst="rect">
             <a:avLst/>
@@ -3357,7 +3357,7 @@
         <p:spPr>
           <a:xfrm>
             <a:off x="640080" y="1700784"/>
-            <a:ext cx="1997964" cy="27432"/>
+            <a:ext cx="2697480" cy="27432"/>
           </a:xfrm>
           <a:prstGeom prst="rect">
             <a:avLst/>
@@ -3377,7 +3377,7 @@
         <p:spPr>
           <a:xfrm>
             <a:off x="731520" y="1719072"/>
-            <a:ext cx="1815084" cy="274320"/>
+            <a:ext cx="2514600" cy="274320"/>
           </a:xfrm>
           <a:prstGeom prst="rect">
             <a:avLst/>
@@ -3398,7 +3398,7 @@
                   <a:srgbClr val="FFFFFF"/>
                 </a:solidFill>
               </a:rPr>
-              <a:t>zcl_04_aggr.clas.abap</a:t>
+              <a:t>zcl_pc_pushdown_demo.clas.abap</a:t>
             </a:r>
             <a:endParaRPr lang="en-US" sz="950" dirty="0"/>
           </a:p>
@@ -3434,7 +3434,7 @@
                   <a:srgbClr val="9DA5B4"/>
                 </a:solidFill>
               </a:rPr>
-              <a:t>ZS4D401_## › ZCL_04_AGGR › main</a:t>
+              <a:t>Exemplo sobre ZTA_PC_PEDIDO › main</a:t>
             </a:r>
             <a:endParaRPr lang="en-US" sz="850" dirty="0"/>
           </a:p>
@@ -3776,13 +3776,13 @@
             <a:r>
               <a:rPr lang="en-US" sz="1050" dirty="0">
                 <a:solidFill>
-                  <a:srgbClr val="4EC9B0"/>
-                </a:solidFill>
-                <a:latin typeface="Courier New" pitchFamily="34" charset="0"/>
-                <a:ea typeface="Courier New" pitchFamily="34" charset="-122"/>
-                <a:cs typeface="Courier New" pitchFamily="34" charset="-120"/>
-              </a:rPr>
-              <a:t>/dmo/flight</a:t>
+                  <a:srgbClr val="CCCCCC"/>
+                </a:solidFill>
+                <a:latin typeface="Courier New" pitchFamily="34" charset="0"/>
+                <a:ea typeface="Courier New" pitchFamily="34" charset="-122"/>
+                <a:cs typeface="Courier New" pitchFamily="34" charset="-120"/>
+              </a:rPr>
+              <a:t>zta_pc_pedido</a:t>
             </a:r>
             <a:endParaRPr lang="en-US" sz="1050" dirty="0"/>
           </a:p>
@@ -3835,7 +3835,7 @@
                 <a:ea typeface="Courier New" pitchFamily="34" charset="-122"/>
                 <a:cs typeface="Courier New" pitchFamily="34" charset="-120"/>
               </a:rPr>
-              <a:t>carrier_id</a:t>
+              <a:t>status_pedido</a:t>
             </a:r>
             <a:r>
               <a:rPr lang="en-US" sz="1050" dirty="0">
@@ -3943,7 +3943,7 @@
                 <a:ea typeface="Courier New" pitchFamily="34" charset="-122"/>
                 <a:cs typeface="Courier New" pitchFamily="34" charset="-120"/>
               </a:rPr>
-              <a:t>                         </a:t>
+              <a:t>                          </a:t>
             </a:r>
             <a:r>
               <a:rPr lang="en-US" sz="1050" dirty="0">
@@ -3976,7 +3976,7 @@
                 <a:ea typeface="Courier New" pitchFamily="34" charset="-122"/>
                 <a:cs typeface="Courier New" pitchFamily="34" charset="-120"/>
               </a:rPr>
-              <a:t>flights</a:t>
+              <a:t>pedidos</a:t>
             </a:r>
             <a:r>
               <a:rPr lang="en-US" sz="1050" dirty="0">
@@ -4051,7 +4051,7 @@
                 <a:ea typeface="Courier New" pitchFamily="34" charset="-122"/>
                 <a:cs typeface="Courier New" pitchFamily="34" charset="-120"/>
               </a:rPr>
-              <a:t>seats_occupied</a:t>
+              <a:t>valor_total</a:t>
             </a:r>
             <a:r>
               <a:rPr lang="en-US" sz="1050" dirty="0">
@@ -4084,7 +4084,7 @@
                 <a:ea typeface="Courier New" pitchFamily="34" charset="-122"/>
                 <a:cs typeface="Courier New" pitchFamily="34" charset="-120"/>
               </a:rPr>
-              <a:t>              </a:t>
+              <a:t>                  </a:t>
             </a:r>
             <a:r>
               <a:rPr lang="en-US" sz="1050" dirty="0">
@@ -4117,7 +4117,7 @@
                 <a:ea typeface="Courier New" pitchFamily="34" charset="-122"/>
                 <a:cs typeface="Courier New" pitchFamily="34" charset="-120"/>
               </a:rPr>
-              <a:t>passengers</a:t>
+              <a:t>total</a:t>
             </a:r>
             <a:r>
               <a:rPr lang="en-US" sz="1050" dirty="0">
@@ -4192,7 +4192,7 @@
                 <a:ea typeface="Courier New" pitchFamily="34" charset="-122"/>
                 <a:cs typeface="Courier New" pitchFamily="34" charset="-120"/>
               </a:rPr>
-              <a:t>seats_occupied</a:t>
+              <a:t>valor_total</a:t>
             </a:r>
             <a:r>
               <a:rPr lang="en-US" sz="1050" dirty="0">
@@ -4269,7 +4269,7 @@
                 <a:ea typeface="Courier New" pitchFamily="34" charset="-122"/>
                 <a:cs typeface="Courier New" pitchFamily="34" charset="-120"/>
               </a:rPr>
-              <a:t>10</a:t>
+              <a:t>15</a:t>
             </a:r>
             <a:r>
               <a:rPr lang="en-US" sz="1050" dirty="0">
@@ -4357,40 +4357,40 @@
                 <a:ea typeface="Courier New" pitchFamily="34" charset="-122"/>
                 <a:cs typeface="Courier New" pitchFamily="34" charset="-120"/>
               </a:rPr>
+              <a:t>  </a:t>
+            </a:r>
+            <a:r>
+              <a:rPr lang="en-US" sz="1050" dirty="0">
+                <a:solidFill>
+                  <a:srgbClr val="569CD6"/>
+                </a:solidFill>
+                <a:latin typeface="Courier New" pitchFamily="34" charset="0"/>
+                <a:ea typeface="Courier New" pitchFamily="34" charset="-122"/>
+                <a:cs typeface="Courier New" pitchFamily="34" charset="-120"/>
+              </a:rPr>
+              <a:t>AS</a:t>
+            </a:r>
+            <a:r>
+              <a:rPr lang="en-US" sz="1050" dirty="0">
+                <a:solidFill>
+                  <a:srgbClr val="CCCCCC"/>
+                </a:solidFill>
+                <a:latin typeface="Courier New" pitchFamily="34" charset="0"/>
+                <a:ea typeface="Courier New" pitchFamily="34" charset="-122"/>
+                <a:cs typeface="Courier New" pitchFamily="34" charset="-120"/>
+              </a:rPr>
               <a:t> </a:t>
             </a:r>
             <a:r>
               <a:rPr lang="en-US" sz="1050" dirty="0">
                 <a:solidFill>
-                  <a:srgbClr val="569CD6"/>
-                </a:solidFill>
-                <a:latin typeface="Courier New" pitchFamily="34" charset="0"/>
-                <a:ea typeface="Courier New" pitchFamily="34" charset="-122"/>
-                <a:cs typeface="Courier New" pitchFamily="34" charset="-120"/>
-              </a:rPr>
-              <a:t>AS</a:t>
-            </a:r>
-            <a:r>
-              <a:rPr lang="en-US" sz="1050" dirty="0">
-                <a:solidFill>
-                  <a:srgbClr val="CCCCCC"/>
-                </a:solidFill>
-                <a:latin typeface="Courier New" pitchFamily="34" charset="0"/>
-                <a:ea typeface="Courier New" pitchFamily="34" charset="-122"/>
-                <a:cs typeface="Courier New" pitchFamily="34" charset="-120"/>
-              </a:rPr>
-              <a:t> </a:t>
-            </a:r>
-            <a:r>
-              <a:rPr lang="en-US" sz="1050" dirty="0">
-                <a:solidFill>
-                  <a:srgbClr val="CCCCCC"/>
-                </a:solidFill>
-                <a:latin typeface="Courier New" pitchFamily="34" charset="0"/>
-                <a:ea typeface="Courier New" pitchFamily="34" charset="-122"/>
-                <a:cs typeface="Courier New" pitchFamily="34" charset="-120"/>
-              </a:rPr>
-              <a:t>avg_seats</a:t>
+                  <a:srgbClr val="CCCCCC"/>
+                </a:solidFill>
+                <a:latin typeface="Courier New" pitchFamily="34" charset="0"/>
+                <a:ea typeface="Courier New" pitchFamily="34" charset="-122"/>
+                <a:cs typeface="Courier New" pitchFamily="34" charset="-120"/>
+              </a:rPr>
+              <a:t>ticket_medio</a:t>
             </a:r>
             <a:r>
               <a:rPr lang="en-US" sz="1050" dirty="0">
@@ -4465,7 +4465,7 @@
                 <a:ea typeface="Courier New" pitchFamily="34" charset="-122"/>
                 <a:cs typeface="Courier New" pitchFamily="34" charset="-120"/>
               </a:rPr>
-              <a:t>flight_date</a:t>
+              <a:t>created_at</a:t>
             </a:r>
             <a:r>
               <a:rPr lang="en-US" sz="1050" dirty="0">
@@ -4498,7 +4498,7 @@
                 <a:ea typeface="Courier New" pitchFamily="34" charset="-122"/>
                 <a:cs typeface="Courier New" pitchFamily="34" charset="-120"/>
               </a:rPr>
-              <a:t>                 </a:t>
+              <a:t>                   </a:t>
             </a:r>
             <a:r>
               <a:rPr lang="en-US" sz="1050" dirty="0">
@@ -4531,7 +4531,7 @@
                 <a:ea typeface="Courier New" pitchFamily="34" charset="-122"/>
                 <a:cs typeface="Courier New" pitchFamily="34" charset="-120"/>
               </a:rPr>
-              <a:t>last_flight</a:t>
+              <a:t>ultimo_pedido</a:t>
             </a:r>
             <a:r>
               <a:rPr lang="en-US" sz="1050" dirty="0">
@@ -4628,7 +4628,7 @@
                 <a:ea typeface="Courier New" pitchFamily="34" charset="-122"/>
                 <a:cs typeface="Courier New" pitchFamily="34" charset="-120"/>
               </a:rPr>
-              <a:t>connection_id</a:t>
+              <a:t>cliente_uuid</a:t>
             </a:r>
             <a:r>
               <a:rPr lang="en-US" sz="1050" dirty="0">
@@ -4661,7 +4661,7 @@
                 <a:ea typeface="Courier New" pitchFamily="34" charset="-122"/>
                 <a:cs typeface="Courier New" pitchFamily="34" charset="-120"/>
               </a:rPr>
-              <a:t>    </a:t>
+              <a:t>      </a:t>
             </a:r>
             <a:r>
               <a:rPr lang="en-US" sz="1050" dirty="0">
@@ -4694,7 +4694,7 @@
                 <a:ea typeface="Courier New" pitchFamily="34" charset="-122"/>
                 <a:cs typeface="Courier New" pitchFamily="34" charset="-120"/>
               </a:rPr>
-              <a:t>routes</a:t>
+              <a:t>clientes</a:t>
             </a:r>
             <a:endParaRPr lang="en-US" sz="1050" dirty="0"/>
           </a:p>
@@ -4747,7 +4747,7 @@
                 <a:ea typeface="Courier New" pitchFamily="34" charset="-122"/>
                 <a:cs typeface="Courier New" pitchFamily="34" charset="-120"/>
               </a:rPr>
-              <a:t>flight_date</a:t>
+              <a:t>created_at</a:t>
             </a:r>
             <a:r>
               <a:rPr lang="en-US" sz="1050" dirty="0">
@@ -4813,7 +4813,7 @@
                 <a:ea typeface="Courier New" pitchFamily="34" charset="-122"/>
                 <a:cs typeface="Courier New" pitchFamily="34" charset="-120"/>
               </a:rPr>
-              <a:t>lv_from</a:t>
+              <a:t>lv_desde</a:t>
             </a:r>
             <a:endParaRPr lang="en-US" sz="1050" dirty="0"/>
           </a:p>
@@ -4888,7 +4888,7 @@
                 <a:ea typeface="Courier New" pitchFamily="34" charset="-122"/>
                 <a:cs typeface="Courier New" pitchFamily="34" charset="-120"/>
               </a:rPr>
-              <a:t>carrier_id</a:t>
+              <a:t>status_pedido</a:t>
             </a:r>
             <a:endParaRPr lang="en-US" sz="1050" dirty="0"/>
           </a:p>
@@ -4974,7 +4974,7 @@
                 <a:ea typeface="Courier New" pitchFamily="34" charset="-122"/>
                 <a:cs typeface="Courier New" pitchFamily="34" charset="-120"/>
               </a:rPr>
-              <a:t>seats_occupied</a:t>
+              <a:t>valor_total</a:t>
             </a:r>
             <a:r>
               <a:rPr lang="en-US" sz="1050" dirty="0">
@@ -5115,7 +5115,7 @@
                 <a:ea typeface="Courier New" pitchFamily="34" charset="-122"/>
                 <a:cs typeface="Courier New" pitchFamily="34" charset="-120"/>
               </a:rPr>
-              <a:t>passengers</a:t>
+              <a:t>total</a:t>
             </a:r>
             <a:r>
               <a:rPr lang="en-US" sz="1050" dirty="0">
@@ -6467,7 +6467,7 @@
         </p:blipFill>
         <p:spPr>
           <a:xfrm>
-            <a:off x="6562192" y="3050667"/>
+            <a:off x="877824" y="3050667"/>
             <a:ext cx="256032" cy="256032"/>
           </a:xfrm>
           <a:prstGeom prst="rect">
@@ -6491,7 +6491,7 @@
         </p:blipFill>
         <p:spPr>
           <a:xfrm>
-            <a:off x="877824" y="3050667"/>
+            <a:off x="6562192" y="3050667"/>
             <a:ext cx="256032" cy="256032"/>
           </a:xfrm>
           <a:prstGeom prst="rect">
@@ -6635,7 +6635,7 @@
                   <a:srgbClr val="FFFFFF"/>
                 </a:solidFill>
               </a:rPr>
-              <a:t>O que aprendemos na aula 04.04</a:t>
+              <a:t>O que aprendemos na aula 02.04</a:t>
             </a:r>
             <a:endParaRPr lang="en-US" sz="3200" dirty="0"/>
           </a:p>
@@ -7293,7 +7293,7 @@
                   <a:srgbClr val="89D1FF"/>
                 </a:solidFill>
               </a:rPr>
-              <a:t>Próxima aula · 04.05  </a:t>
+              <a:t>Próxima aula · 02.05  </a:t>
             </a:r>
             <a:r>
               <a:rPr lang="en-US" sz="1500" dirty="0">
@@ -7395,7 +7395,7 @@
         </p:blipFill>
         <p:spPr>
           <a:xfrm>
-            <a:off x="6355080" y="3886200"/>
+            <a:off x="822960" y="2926080"/>
             <a:ext cx="256032" cy="256032"/>
           </a:xfrm>
           <a:prstGeom prst="rect">
@@ -7419,7 +7419,7 @@
         </p:blipFill>
         <p:spPr>
           <a:xfrm>
-            <a:off x="822960" y="3886200"/>
+            <a:off x="6355080" y="3886200"/>
             <a:ext cx="256032" cy="256032"/>
           </a:xfrm>
           <a:prstGeom prst="rect">
@@ -7443,7 +7443,7 @@
         </p:blipFill>
         <p:spPr>
           <a:xfrm>
-            <a:off x="822960" y="2926080"/>
+            <a:off x="822960" y="3886200"/>
             <a:ext cx="256032" cy="256032"/>
           </a:xfrm>
           <a:prstGeom prst="rect">
@@ -7570,7 +7570,7 @@
                   <a:srgbClr val="1D2D3E"/>
                 </a:solidFill>
               </a:rPr>
-              <a:t>Módulo 04 em 9 aulas: ABAP intermediário</a:t>
+              <a:t>Módulo 02 em 9 aulas: ABAP intermediário</a:t>
             </a:r>
             <a:endParaRPr lang="en-US" sz="2800" dirty="0"/>
           </a:p>
@@ -9152,7 +9152,7 @@
                   <a:srgbClr val="1D2D3E"/>
                 </a:solidFill>
               </a:rPr>
-              <a:t>substituímos loops de cálculo no servidor por um único SELECT que já devolve os voos com dados da companhia, assentos livres e totais.</a:t>
+              <a:t>substituímos loops de cálculo no servidor por um único SELECT que já devolve os pedidos com dados do cliente, saldos de estoque e totais por status.</a:t>
             </a:r>
             <a:endParaRPr lang="en-US" sz="1400" dirty="0"/>
           </a:p>
@@ -9174,7 +9174,7 @@
         </p:blipFill>
         <p:spPr>
           <a:xfrm>
-            <a:off x="4328038" y="1847088"/>
+            <a:off x="6583497" y="1847088"/>
             <a:ext cx="347472" cy="347472"/>
           </a:xfrm>
           <a:prstGeom prst="rect">
@@ -9222,7 +9222,7 @@
         </p:blipFill>
         <p:spPr>
           <a:xfrm>
-            <a:off x="8838956" y="1847088"/>
+            <a:off x="4328038" y="1847088"/>
             <a:ext cx="347472" cy="347472"/>
           </a:xfrm>
           <a:prstGeom prst="rect">
@@ -9246,7 +9246,7 @@
         </p:blipFill>
         <p:spPr>
           <a:xfrm>
-            <a:off x="6583497" y="1847088"/>
+            <a:off x="8838956" y="1847088"/>
             <a:ext cx="347472" cy="347472"/>
           </a:xfrm>
           <a:prstGeom prst="rect">
@@ -9318,7 +9318,7 @@
         </p:blipFill>
         <p:spPr>
           <a:xfrm>
-            <a:off x="4328038" y="3858768"/>
+            <a:off x="6583497" y="3858768"/>
             <a:ext cx="347472" cy="347472"/>
           </a:xfrm>
           <a:prstGeom prst="rect">
@@ -9342,7 +9342,7 @@
         </p:blipFill>
         <p:spPr>
           <a:xfrm>
-            <a:off x="6583497" y="3858768"/>
+            <a:off x="4328038" y="3858768"/>
             <a:ext cx="347472" cy="347472"/>
           </a:xfrm>
           <a:prstGeom prst="rect">
@@ -9366,8 +9366,8 @@
         </p:blipFill>
         <p:spPr>
           <a:xfrm>
-            <a:off x="8838956" y="3858768"/>
-            <a:ext cx="347472" cy="347472"/>
+            <a:off x="749808" y="5751576"/>
+            <a:ext cx="310896" cy="310896"/>
           </a:xfrm>
           <a:prstGeom prst="rect">
             <a:avLst/>
@@ -9390,8 +9390,8 @@
         </p:blipFill>
         <p:spPr>
           <a:xfrm>
-            <a:off x="749808" y="5751576"/>
-            <a:ext cx="310896" cy="310896"/>
+            <a:off x="8838956" y="3858768"/>
+            <a:ext cx="347472" cy="347472"/>
           </a:xfrm>
           <a:prstGeom prst="rect">
             <a:avLst/>
@@ -9854,7 +9854,7 @@
                   <a:srgbClr val="0064D9"/>
                 </a:solidFill>
               </a:rPr>
-              <a:t>CDS view (módulo 02)</a:t>
+              <a:t>CDS view (módulo 03)</a:t>
             </a:r>
             <a:endParaRPr lang="en-US" sz="1600" dirty="0"/>
           </a:p>
@@ -10034,7 +10034,7 @@
         </p:blipFill>
         <p:spPr>
           <a:xfrm>
-            <a:off x="877824" y="2792063"/>
+            <a:off x="6562192" y="2792063"/>
             <a:ext cx="256032" cy="256032"/>
           </a:xfrm>
           <a:prstGeom prst="rect">
@@ -10058,8 +10058,8 @@
         </p:blipFill>
         <p:spPr>
           <a:xfrm>
-            <a:off x="749808" y="4962049"/>
-            <a:ext cx="310896" cy="310896"/>
+            <a:off x="877824" y="2792063"/>
+            <a:ext cx="256032" cy="256032"/>
           </a:xfrm>
           <a:prstGeom prst="rect">
             <a:avLst/>
@@ -10082,8 +10082,8 @@
         </p:blipFill>
         <p:spPr>
           <a:xfrm>
-            <a:off x="6562192" y="2792063"/>
-            <a:ext cx="256032" cy="256032"/>
+            <a:off x="749808" y="4962049"/>
+            <a:ext cx="310896" cy="310896"/>
           </a:xfrm>
           <a:prstGeom prst="rect">
             <a:avLst/>
@@ -10212,7 +10212,7 @@
                   <a:srgbClr val="89D1FF"/>
                 </a:solidFill>
               </a:rPr>
-              <a:t>AULA 04.04 · SEÇÃO 1</a:t>
+              <a:t>AULA 02.04 · SEÇÃO 1</a:t>
             </a:r>
             <a:endParaRPr lang="en-US" sz="1300" dirty="0"/>
           </a:p>
@@ -10687,7 +10687,7 @@
                   <a:srgbClr val="1D2D3E"/>
                 </a:solidFill>
               </a:rPr>
-              <a:t>Companhias e conexões em um único SELECT</a:t>
+              <a:t>Pedidos e clientes em um único SELECT</a:t>
             </a:r>
             <a:endParaRPr lang="en-US" sz="2800" dirty="0"/>
           </a:p>
@@ -10751,7 +10751,7 @@
         <p:spPr>
           <a:xfrm>
             <a:off x="640080" y="1700784"/>
-            <a:ext cx="1997964" cy="292608"/>
+            <a:ext cx="2697480" cy="292608"/>
           </a:xfrm>
           <a:prstGeom prst="rect">
             <a:avLst/>
@@ -10771,7 +10771,7 @@
         <p:spPr>
           <a:xfrm>
             <a:off x="640080" y="1700784"/>
-            <a:ext cx="1997964" cy="27432"/>
+            <a:ext cx="2697480" cy="27432"/>
           </a:xfrm>
           <a:prstGeom prst="rect">
             <a:avLst/>
@@ -10791,7 +10791,7 @@
         <p:spPr>
           <a:xfrm>
             <a:off x="731520" y="1719072"/>
-            <a:ext cx="1815084" cy="274320"/>
+            <a:ext cx="2514600" cy="274320"/>
           </a:xfrm>
           <a:prstGeom prst="rect">
             <a:avLst/>
@@ -10812,7 +10812,7 @@
                   <a:srgbClr val="FFFFFF"/>
                 </a:solidFill>
               </a:rPr>
-              <a:t>zcl_04_join.clas.abap</a:t>
+              <a:t>zcl_pc_pushdown_demo.clas.abap</a:t>
             </a:r>
             <a:endParaRPr lang="en-US" sz="950" dirty="0"/>
           </a:p>
@@ -10848,7 +10848,7 @@
                   <a:srgbClr val="9DA5B4"/>
                 </a:solidFill>
               </a:rPr>
-              <a:t>ZS4D401_## › ZCL_04_JOIN › main</a:t>
+              <a:t>Exemplo sobre as tabelas do projeto › main</a:t>
             </a:r>
             <a:endParaRPr lang="en-US" sz="850" dirty="0"/>
           </a:p>
@@ -11150,13 +11150,13 @@
             <a:r>
               <a:rPr lang="en-US" sz="1050" dirty="0">
                 <a:solidFill>
-                  <a:srgbClr val="4EC9B0"/>
-                </a:solidFill>
-                <a:latin typeface="Courier New" pitchFamily="34" charset="0"/>
-                <a:ea typeface="Courier New" pitchFamily="34" charset="-122"/>
-                <a:cs typeface="Courier New" pitchFamily="34" charset="-120"/>
-              </a:rPr>
-              <a:t>/dmo/carrier</a:t>
+                  <a:srgbClr val="CCCCCC"/>
+                </a:solidFill>
+                <a:latin typeface="Courier New" pitchFamily="34" charset="0"/>
+                <a:ea typeface="Courier New" pitchFamily="34" charset="-122"/>
+                <a:cs typeface="Courier New" pitchFamily="34" charset="-120"/>
+              </a:rPr>
+              <a:t>zta_pc_pedido</a:t>
             </a:r>
             <a:r>
               <a:rPr lang="en-US" sz="1050" dirty="0">
@@ -11200,7 +11200,7 @@
                 <a:ea typeface="Courier New" pitchFamily="34" charset="-122"/>
                 <a:cs typeface="Courier New" pitchFamily="34" charset="-120"/>
               </a:rPr>
-              <a:t>a</a:t>
+              <a:t>p</a:t>
             </a:r>
             <a:endParaRPr lang="en-US" sz="1050" dirty="0"/>
           </a:p>
@@ -11269,13 +11269,13 @@
             <a:r>
               <a:rPr lang="en-US" sz="1050" dirty="0">
                 <a:solidFill>
-                  <a:srgbClr val="4EC9B0"/>
-                </a:solidFill>
-                <a:latin typeface="Courier New" pitchFamily="34" charset="0"/>
-                <a:ea typeface="Courier New" pitchFamily="34" charset="-122"/>
-                <a:cs typeface="Courier New" pitchFamily="34" charset="-120"/>
-              </a:rPr>
-              <a:t>/dmo/connection</a:t>
+                  <a:srgbClr val="CCCCCC"/>
+                </a:solidFill>
+                <a:latin typeface="Courier New" pitchFamily="34" charset="0"/>
+                <a:ea typeface="Courier New" pitchFamily="34" charset="-122"/>
+                <a:cs typeface="Courier New" pitchFamily="34" charset="-120"/>
+              </a:rPr>
+              <a:t>zta_pc_cliente</a:t>
             </a:r>
             <a:r>
               <a:rPr lang="en-US" sz="1050" dirty="0">
@@ -11372,7 +11372,7 @@
                 <a:ea typeface="Courier New" pitchFamily="34" charset="-122"/>
                 <a:cs typeface="Courier New" pitchFamily="34" charset="-120"/>
               </a:rPr>
-              <a:t>a~carrier_id</a:t>
+              <a:t>p~cliente_uuid</a:t>
             </a:r>
             <a:r>
               <a:rPr lang="en-US" sz="1050" dirty="0">
@@ -11416,7 +11416,7 @@
                 <a:ea typeface="Courier New" pitchFamily="34" charset="-122"/>
                 <a:cs typeface="Courier New" pitchFamily="34" charset="-120"/>
               </a:rPr>
-              <a:t>c~carrier_id</a:t>
+              <a:t>c~cliente_uuid</a:t>
             </a:r>
             <a:endParaRPr lang="en-US" sz="1050" dirty="0"/>
           </a:p>
@@ -11469,7 +11469,7 @@
                 <a:ea typeface="Courier New" pitchFamily="34" charset="-122"/>
                 <a:cs typeface="Courier New" pitchFamily="34" charset="-120"/>
               </a:rPr>
-              <a:t>a~carrier_id</a:t>
+              <a:t>p~cliente_uuid</a:t>
             </a:r>
             <a:r>
               <a:rPr lang="en-US" sz="1050" dirty="0">
@@ -11511,51 +11511,7 @@
                 <a:ea typeface="Courier New" pitchFamily="34" charset="-122"/>
                 <a:cs typeface="Courier New" pitchFamily="34" charset="-120"/>
               </a:rPr>
-              <a:t>name</a:t>
-            </a:r>
-            <a:r>
-              <a:rPr lang="en-US" sz="1050" dirty="0">
-                <a:solidFill>
-                  <a:srgbClr val="CCCCCC"/>
-                </a:solidFill>
-                <a:latin typeface="Courier New" pitchFamily="34" charset="0"/>
-                <a:ea typeface="Courier New" pitchFamily="34" charset="-122"/>
-                <a:cs typeface="Courier New" pitchFamily="34" charset="-120"/>
-              </a:rPr>
-              <a:t> </a:t>
-            </a:r>
-            <a:r>
-              <a:rPr lang="en-US" sz="1050" dirty="0">
-                <a:solidFill>
-                  <a:srgbClr val="569CD6"/>
-                </a:solidFill>
-                <a:latin typeface="Courier New" pitchFamily="34" charset="0"/>
-                <a:ea typeface="Courier New" pitchFamily="34" charset="-122"/>
-                <a:cs typeface="Courier New" pitchFamily="34" charset="-120"/>
-              </a:rPr>
-              <a:t>AS</a:t>
-            </a:r>
-            <a:r>
-              <a:rPr lang="en-US" sz="1050" dirty="0">
-                <a:solidFill>
-                  <a:srgbClr val="CCCCCC"/>
-                </a:solidFill>
-                <a:latin typeface="Courier New" pitchFamily="34" charset="0"/>
-                <a:ea typeface="Courier New" pitchFamily="34" charset="-122"/>
-                <a:cs typeface="Courier New" pitchFamily="34" charset="-120"/>
-              </a:rPr>
-              <a:t> </a:t>
-            </a:r>
-            <a:r>
-              <a:rPr lang="en-US" sz="1050" dirty="0">
-                <a:solidFill>
-                  <a:srgbClr val="CCCCCC"/>
-                </a:solidFill>
-                <a:latin typeface="Courier New" pitchFamily="34" charset="0"/>
-                <a:ea typeface="Courier New" pitchFamily="34" charset="-122"/>
-                <a:cs typeface="Courier New" pitchFamily="34" charset="-120"/>
-              </a:rPr>
-              <a:t>carrier_name</a:t>
+              <a:t>numero_pedido</a:t>
             </a:r>
             <a:r>
               <a:rPr lang="en-US" sz="1050" dirty="0">
@@ -11597,7 +11553,51 @@
                 <a:ea typeface="Courier New" pitchFamily="34" charset="-122"/>
                 <a:cs typeface="Courier New" pitchFamily="34" charset="-120"/>
               </a:rPr>
-              <a:t>connection_id</a:t>
+              <a:t>nome</a:t>
+            </a:r>
+            <a:r>
+              <a:rPr lang="en-US" sz="1050" dirty="0">
+                <a:solidFill>
+                  <a:srgbClr val="CCCCCC"/>
+                </a:solidFill>
+                <a:latin typeface="Courier New" pitchFamily="34" charset="0"/>
+                <a:ea typeface="Courier New" pitchFamily="34" charset="-122"/>
+                <a:cs typeface="Courier New" pitchFamily="34" charset="-120"/>
+              </a:rPr>
+              <a:t> </a:t>
+            </a:r>
+            <a:r>
+              <a:rPr lang="en-US" sz="1050" dirty="0">
+                <a:solidFill>
+                  <a:srgbClr val="569CD6"/>
+                </a:solidFill>
+                <a:latin typeface="Courier New" pitchFamily="34" charset="0"/>
+                <a:ea typeface="Courier New" pitchFamily="34" charset="-122"/>
+                <a:cs typeface="Courier New" pitchFamily="34" charset="-120"/>
+              </a:rPr>
+              <a:t>AS</a:t>
+            </a:r>
+            <a:r>
+              <a:rPr lang="en-US" sz="1050" dirty="0">
+                <a:solidFill>
+                  <a:srgbClr val="CCCCCC"/>
+                </a:solidFill>
+                <a:latin typeface="Courier New" pitchFamily="34" charset="0"/>
+                <a:ea typeface="Courier New" pitchFamily="34" charset="-122"/>
+                <a:cs typeface="Courier New" pitchFamily="34" charset="-120"/>
+              </a:rPr>
+              <a:t> </a:t>
+            </a:r>
+            <a:r>
+              <a:rPr lang="en-US" sz="1050" dirty="0">
+                <a:solidFill>
+                  <a:srgbClr val="CCCCCC"/>
+                </a:solidFill>
+                <a:latin typeface="Courier New" pitchFamily="34" charset="0"/>
+                <a:ea typeface="Courier New" pitchFamily="34" charset="-122"/>
+                <a:cs typeface="Courier New" pitchFamily="34" charset="-120"/>
+              </a:rPr>
+              <a:t>cliente</a:t>
             </a:r>
             <a:r>
               <a:rPr lang="en-US" sz="1050" dirty="0">
@@ -11639,7 +11639,7 @@
                 <a:ea typeface="Courier New" pitchFamily="34" charset="-122"/>
                 <a:cs typeface="Courier New" pitchFamily="34" charset="-120"/>
               </a:rPr>
-              <a:t>airport_from_id</a:t>
+              <a:t>cpf</a:t>
             </a:r>
             <a:r>
               <a:rPr lang="en-US" sz="1050" dirty="0">
@@ -11681,7 +11681,7 @@
                 <a:ea typeface="Courier New" pitchFamily="34" charset="-122"/>
                 <a:cs typeface="Courier New" pitchFamily="34" charset="-120"/>
               </a:rPr>
-              <a:t>airport_to_id</a:t>
+              <a:t>valor_total</a:t>
             </a:r>
             <a:endParaRPr lang="en-US" sz="1050" dirty="0"/>
           </a:p>
@@ -11734,7 +11734,7 @@
                 <a:ea typeface="Courier New" pitchFamily="34" charset="-122"/>
                 <a:cs typeface="Courier New" pitchFamily="34" charset="-120"/>
               </a:rPr>
-              <a:t>currency_code</a:t>
+              <a:t>status_pedido</a:t>
             </a:r>
             <a:r>
               <a:rPr lang="en-US" sz="1050" dirty="0">
@@ -11778,7 +11778,7 @@
                 <a:ea typeface="Courier New" pitchFamily="34" charset="-122"/>
                 <a:cs typeface="Courier New" pitchFamily="34" charset="-120"/>
               </a:rPr>
-              <a:t>'EUR'</a:t>
+              <a:t>'ABERTO'</a:t>
             </a:r>
             <a:endParaRPr lang="en-US" sz="1050" dirty="0"/>
           </a:p>
@@ -12179,7 +12179,7 @@
                 <a:ea typeface="Courier New" pitchFamily="34" charset="-122"/>
                 <a:cs typeface="Courier New" pitchFamily="34" charset="-120"/>
               </a:rPr>
-              <a:t>AS a</a:t>
+              <a:t>AS p</a:t>
             </a:r>
             <a:r>
               <a:rPr lang="en-US" sz="1050" dirty="0">
@@ -12299,7 +12299,7 @@
                 <a:ea typeface="Courier New" pitchFamily="34" charset="-122"/>
                 <a:cs typeface="Courier New" pitchFamily="34" charset="-120"/>
               </a:rPr>
-              <a:t>carrier_id</a:t>
+              <a:t>cliente_uuid</a:t>
             </a:r>
             <a:r>
               <a:rPr lang="en-US" sz="1050" dirty="0">
@@ -12307,7 +12307,7 @@
                   <a:srgbClr val="556B82"/>
                 </a:solidFill>
               </a:rPr>
-              <a:t> existe nas duas fontes; </a:t>
+              <a:t> existe nas duas tabelas; </a:t>
             </a:r>
             <a:r>
               <a:rPr lang="en-US" sz="1050" dirty="0">
@@ -12318,7 +12318,7 @@
                 <a:ea typeface="Courier New" pitchFamily="34" charset="-122"/>
                 <a:cs typeface="Courier New" pitchFamily="34" charset="-120"/>
               </a:rPr>
-              <a:t>name</a:t>
+              <a:t>nome</a:t>
             </a:r>
             <a:r>
               <a:rPr lang="en-US" sz="1050" dirty="0">
@@ -12326,7 +12326,26 @@
                   <a:srgbClr val="556B82"/>
                 </a:solidFill>
               </a:rPr>
-              <a:t> só em uma.</a:t>
+              <a:t> e </a:t>
+            </a:r>
+            <a:r>
+              <a:rPr lang="en-US" sz="1050" dirty="0">
+                <a:solidFill>
+                  <a:srgbClr val="0064D9"/>
+                </a:solidFill>
+                <a:latin typeface="Courier New" pitchFamily="34" charset="0"/>
+                <a:ea typeface="Courier New" pitchFamily="34" charset="-122"/>
+                <a:cs typeface="Courier New" pitchFamily="34" charset="-120"/>
+              </a:rPr>
+              <a:t>cpf</a:t>
+            </a:r>
+            <a:r>
+              <a:rPr lang="en-US" sz="1050" dirty="0">
+                <a:solidFill>
+                  <a:srgbClr val="556B82"/>
+                </a:solidFill>
+              </a:rPr>
+              <a:t>, só no cliente.</a:t>
             </a:r>
             <a:endParaRPr lang="en-US" sz="1400" dirty="0"/>
           </a:p>
@@ -12435,7 +12454,7 @@
                   <a:srgbClr val="556B82"/>
                 </a:solidFill>
               </a:rPr>
-              <a:t>Unir uma tabela com ela mesma exige aliases, ex.: conexões com escala.</a:t>
+              <a:t>Unir uma tabela com ela mesma exige aliases, ex.: comparar pedidos do mesmo cliente.</a:t>
             </a:r>
             <a:endParaRPr lang="en-US" sz="1400" dirty="0"/>
           </a:p>
@@ -12690,7 +12709,7 @@
                   <a:srgbClr val="556B82"/>
                 </a:solidFill>
               </a:rPr>
-              <a:t>Só as linhas com correspondência nos dois lados. Companhias sem conexões não aparecem.</a:t>
+              <a:t>Só as linhas com correspondência nos dois lados. Clientes sem pedidos não aparecem.</a:t>
             </a:r>
             <a:endParaRPr lang="en-US" sz="1400" dirty="0"/>
           </a:p>
@@ -13006,7 +13025,7 @@
                   <a:srgbClr val="1D2D3E"/>
                 </a:solidFill>
               </a:rPr>
-              <a:t> em uma CDS view (aula 02.05).</a:t>
+              <a:t> em uma CDS view (aula 03.05).</a:t>
             </a:r>
             <a:endParaRPr lang="en-US" sz="1400" dirty="0"/>
           </a:p>
@@ -13028,7 +13047,7 @@
         </p:blipFill>
         <p:spPr>
           <a:xfrm>
-            <a:off x="850392" y="2768727"/>
+            <a:off x="4624730" y="2768727"/>
             <a:ext cx="256032" cy="256032"/>
           </a:xfrm>
           <a:prstGeom prst="rect">
@@ -13052,7 +13071,7 @@
         </p:blipFill>
         <p:spPr>
           <a:xfrm>
-            <a:off x="4624730" y="2768727"/>
+            <a:off x="8399069" y="2768727"/>
             <a:ext cx="256032" cy="256032"/>
           </a:xfrm>
           <a:prstGeom prst="rect">
@@ -13076,7 +13095,7 @@
         </p:blipFill>
         <p:spPr>
           <a:xfrm>
-            <a:off x="8399069" y="2768727"/>
+            <a:off x="850392" y="2768727"/>
             <a:ext cx="256032" cy="256032"/>
           </a:xfrm>
           <a:prstGeom prst="rect">
@@ -13230,7 +13249,7 @@
                   <a:srgbClr val="89D1FF"/>
                 </a:solidFill>
               </a:rPr>
-              <a:t>AULA 04.04 · SEÇÃO 2</a:t>
+              <a:t>AULA 02.04 · SEÇÃO 2</a:t>
             </a:r>
             <a:endParaRPr lang="en-US" sz="1300" dirty="0"/>
           </a:p>
@@ -13730,7 +13749,7 @@
                   <a:srgbClr val="1D2D3E"/>
                 </a:solidFill>
               </a:rPr>
-              <a:t>Assentos livres, percentuais e textos no banco</a:t>
+              <a:t>Saldo livre, percentuais e textos no banco</a:t>
             </a:r>
             <a:endParaRPr lang="en-US" sz="2800" dirty="0"/>
           </a:p>
@@ -13794,7 +13813,7 @@
         <p:spPr>
           <a:xfrm>
             <a:off x="640080" y="1700784"/>
-            <a:ext cx="1997964" cy="292608"/>
+            <a:ext cx="2697480" cy="292608"/>
           </a:xfrm>
           <a:prstGeom prst="rect">
             <a:avLst/>
@@ -13814,7 +13833,7 @@
         <p:spPr>
           <a:xfrm>
             <a:off x="640080" y="1700784"/>
-            <a:ext cx="1997964" cy="27432"/>
+            <a:ext cx="2697480" cy="27432"/>
           </a:xfrm>
           <a:prstGeom prst="rect">
             <a:avLst/>
@@ -13834,7 +13853,7 @@
         <p:spPr>
           <a:xfrm>
             <a:off x="731520" y="1719072"/>
-            <a:ext cx="1815084" cy="274320"/>
+            <a:ext cx="2514600" cy="274320"/>
           </a:xfrm>
           <a:prstGeom prst="rect">
             <a:avLst/>
@@ -13855,7 +13874,7 @@
                   <a:srgbClr val="FFFFFF"/>
                 </a:solidFill>
               </a:rPr>
-              <a:t>zcl_04_calc.clas.abap</a:t>
+              <a:t>zcl_pc_pushdown_demo.clas.abap</a:t>
             </a:r>
             <a:endParaRPr lang="en-US" sz="950" dirty="0"/>
           </a:p>
@@ -13891,7 +13910,7 @@
                   <a:srgbClr val="9DA5B4"/>
                 </a:solidFill>
               </a:rPr>
-              <a:t>ZS4D401_## › ZCL_04_CALC › main</a:t>
+              <a:t>Exemplo sobre ZTA_PC_ITEM › main</a:t>
             </a:r>
             <a:endParaRPr lang="en-US" sz="850" dirty="0"/>
           </a:p>
@@ -14177,6 +14196,26 @@
             </a:r>
             <a:endParaRPr lang="en-US" sz="950" dirty="0"/>
           </a:p>
+          <a:p>
+            <a:pPr algn="r" indent="0" marL="0">
+              <a:lnSpc>
+                <a:spcPct val="105000"/>
+              </a:lnSpc>
+              <a:buNone/>
+            </a:pPr>
+            <a:r>
+              <a:rPr lang="en-US" sz="950" dirty="0">
+                <a:solidFill>
+                  <a:srgbClr val="6E7681"/>
+                </a:solidFill>
+                <a:latin typeface="Courier New" pitchFamily="34" charset="0"/>
+                <a:ea typeface="Courier New" pitchFamily="34" charset="-122"/>
+                <a:cs typeface="Courier New" pitchFamily="34" charset="-120"/>
+              </a:rPr>
+              <a:t>14</a:t>
+            </a:r>
+            <a:endParaRPr lang="en-US" sz="950" dirty="0"/>
+          </a:p>
         </p:txBody>
       </p:sp>
       <p:sp>
@@ -14237,7 +14276,7 @@
                 <a:ea typeface="Courier New" pitchFamily="34" charset="-122"/>
                 <a:cs typeface="Courier New" pitchFamily="34" charset="-120"/>
               </a:rPr>
-              <a:t>c_hundred</a:t>
+              <a:t>c_cem</a:t>
             </a:r>
             <a:r>
               <a:rPr lang="en-US" sz="950" dirty="0">
@@ -14414,13 +14453,13 @@
             <a:r>
               <a:rPr lang="en-US" sz="950" dirty="0">
                 <a:solidFill>
-                  <a:srgbClr val="4EC9B0"/>
-                </a:solidFill>
-                <a:latin typeface="Courier New" pitchFamily="34" charset="0"/>
-                <a:ea typeface="Courier New" pitchFamily="34" charset="-122"/>
-                <a:cs typeface="Courier New" pitchFamily="34" charset="-120"/>
-              </a:rPr>
-              <a:t>/dmo/flight</a:t>
+                  <a:srgbClr val="CCCCCC"/>
+                </a:solidFill>
+                <a:latin typeface="Courier New" pitchFamily="34" charset="0"/>
+                <a:ea typeface="Courier New" pitchFamily="34" charset="-122"/>
+                <a:cs typeface="Courier New" pitchFamily="34" charset="-120"/>
+              </a:rPr>
+              <a:t>zta_pc_item</a:t>
             </a:r>
             <a:endParaRPr lang="en-US" sz="950" dirty="0"/>
           </a:p>
@@ -14473,7 +14512,7 @@
                 <a:ea typeface="Courier New" pitchFamily="34" charset="-122"/>
                 <a:cs typeface="Courier New" pitchFamily="34" charset="-120"/>
               </a:rPr>
-              <a:t>carrier_id</a:t>
+              <a:t>sku</a:t>
             </a:r>
             <a:r>
               <a:rPr lang="en-US" sz="950" dirty="0">
@@ -14506,40 +14545,7 @@
                 <a:ea typeface="Courier New" pitchFamily="34" charset="-122"/>
                 <a:cs typeface="Courier New" pitchFamily="34" charset="-120"/>
               </a:rPr>
-              <a:t>connection_id</a:t>
-            </a:r>
-            <a:r>
-              <a:rPr lang="en-US" sz="950" dirty="0">
-                <a:solidFill>
-                  <a:srgbClr val="CCCCCC"/>
-                </a:solidFill>
-                <a:latin typeface="Courier New" pitchFamily="34" charset="0"/>
-                <a:ea typeface="Courier New" pitchFamily="34" charset="-122"/>
-                <a:cs typeface="Courier New" pitchFamily="34" charset="-120"/>
-              </a:rPr>
-              <a:t>,</a:t>
-            </a:r>
-            <a:r>
-              <a:rPr lang="en-US" sz="950" dirty="0">
-                <a:solidFill>
-                  <a:srgbClr val="CCCCCC"/>
-                </a:solidFill>
-                <a:latin typeface="Courier New" pitchFamily="34" charset="0"/>
-                <a:ea typeface="Courier New" pitchFamily="34" charset="-122"/>
-                <a:cs typeface="Courier New" pitchFamily="34" charset="-120"/>
-              </a:rPr>
-              <a:t> </a:t>
-            </a:r>
-            <a:r>
-              <a:rPr lang="en-US" sz="950" dirty="0">
-                <a:solidFill>
-                  <a:srgbClr val="CCCCCC"/>
-                </a:solidFill>
-                <a:latin typeface="Courier New" pitchFamily="34" charset="0"/>
-                <a:ea typeface="Courier New" pitchFamily="34" charset="-122"/>
-                <a:cs typeface="Courier New" pitchFamily="34" charset="-120"/>
-              </a:rPr>
-              <a:t>flight_date</a:t>
+              <a:t>nome</a:t>
             </a:r>
             <a:r>
               <a:rPr lang="en-US" sz="950" dirty="0">
@@ -14581,7 +14587,7 @@
                 <a:ea typeface="Courier New" pitchFamily="34" charset="-122"/>
                 <a:cs typeface="Courier New" pitchFamily="34" charset="-120"/>
               </a:rPr>
-              <a:t>seats_max</a:t>
+              <a:t>qtde_estoque</a:t>
             </a:r>
             <a:r>
               <a:rPr lang="en-US" sz="950" dirty="0">
@@ -14625,18 +14631,18 @@
                 <a:ea typeface="Courier New" pitchFamily="34" charset="-122"/>
                 <a:cs typeface="Courier New" pitchFamily="34" charset="-120"/>
               </a:rPr>
-              <a:t>seats_occupied</a:t>
-            </a:r>
-            <a:r>
-              <a:rPr lang="en-US" sz="950" dirty="0">
-                <a:solidFill>
-                  <a:srgbClr val="CCCCCC"/>
-                </a:solidFill>
-                <a:latin typeface="Courier New" pitchFamily="34" charset="0"/>
-                <a:ea typeface="Courier New" pitchFamily="34" charset="-122"/>
-                <a:cs typeface="Courier New" pitchFamily="34" charset="-120"/>
-              </a:rPr>
-              <a:t>              </a:t>
+              <a:t>qtde_reservada</a:t>
+            </a:r>
+            <a:r>
+              <a:rPr lang="en-US" sz="950" dirty="0">
+                <a:solidFill>
+                  <a:srgbClr val="CCCCCC"/>
+                </a:solidFill>
+                <a:latin typeface="Courier New" pitchFamily="34" charset="0"/>
+                <a:ea typeface="Courier New" pitchFamily="34" charset="-122"/>
+                <a:cs typeface="Courier New" pitchFamily="34" charset="-120"/>
+              </a:rPr>
+              <a:t>                 </a:t>
             </a:r>
             <a:r>
               <a:rPr lang="en-US" sz="950" dirty="0">
@@ -14669,7 +14675,7 @@
                 <a:ea typeface="Courier New" pitchFamily="34" charset="-122"/>
                 <a:cs typeface="Courier New" pitchFamily="34" charset="-120"/>
               </a:rPr>
-              <a:t>seats_free</a:t>
+              <a:t>qtde_livre</a:t>
             </a:r>
             <a:r>
               <a:rPr lang="en-US" sz="950" dirty="0">
@@ -14744,7 +14750,7 @@
                 <a:ea typeface="Courier New" pitchFamily="34" charset="-122"/>
                 <a:cs typeface="Courier New" pitchFamily="34" charset="-120"/>
               </a:rPr>
-              <a:t>seats_occupied</a:t>
+              <a:t>qtde_reservada</a:t>
             </a:r>
             <a:r>
               <a:rPr lang="en-US" sz="950" dirty="0">
@@ -14799,7 +14805,7 @@
                 <a:ea typeface="Courier New" pitchFamily="34" charset="-122"/>
                 <a:cs typeface="Courier New" pitchFamily="34" charset="-120"/>
               </a:rPr>
-              <a:t>c_hundred</a:t>
+              <a:t>c_cem</a:t>
             </a:r>
             <a:r>
               <a:rPr lang="en-US" sz="950" dirty="0">
@@ -14832,7 +14838,7 @@
                 <a:ea typeface="Courier New" pitchFamily="34" charset="-122"/>
                 <a:cs typeface="Courier New" pitchFamily="34" charset="-120"/>
               </a:rPr>
-              <a:t>seats_max</a:t>
+              <a:t>qtde_estoque</a:t>
             </a:r>
             <a:r>
               <a:rPr lang="en-US" sz="950" dirty="0">
@@ -14865,7 +14871,7 @@
                 <a:ea typeface="Courier New" pitchFamily="34" charset="-122"/>
                 <a:cs typeface="Courier New" pitchFamily="34" charset="-120"/>
               </a:rPr>
-              <a:t> </a:t>
+              <a:t>  </a:t>
             </a:r>
             <a:r>
               <a:rPr lang="en-US" sz="950" dirty="0">
@@ -14973,7 +14979,7 @@
                 <a:ea typeface="Courier New" pitchFamily="34" charset="-122"/>
                 <a:cs typeface="Courier New" pitchFamily="34" charset="-120"/>
               </a:rPr>
-              <a:t>seats_occupied</a:t>
+              <a:t>qtde_reservada</a:t>
             </a:r>
             <a:r>
               <a:rPr lang="en-US" sz="950" dirty="0">
@@ -15050,7 +15056,7 @@
                 <a:ea typeface="Courier New" pitchFamily="34" charset="-122"/>
                 <a:cs typeface="Courier New" pitchFamily="34" charset="-120"/>
               </a:rPr>
-              <a:t>seats_max</a:t>
+              <a:t>qtde_estoque</a:t>
             </a:r>
             <a:r>
               <a:rPr lang="en-US" sz="950" dirty="0">
@@ -15224,7 +15230,7 @@
                 <a:ea typeface="Courier New" pitchFamily="34" charset="-122"/>
                 <a:cs typeface="Courier New" pitchFamily="34" charset="-120"/>
               </a:rPr>
-              <a:t>seats_occupied</a:t>
+              <a:t>preco_unitario</a:t>
             </a:r>
             <a:r>
               <a:rPr lang="en-US" sz="950" dirty="0">
@@ -15268,7 +15274,18 @@
                 <a:ea typeface="Courier New" pitchFamily="34" charset="-122"/>
                 <a:cs typeface="Courier New" pitchFamily="34" charset="-120"/>
               </a:rPr>
-              <a:t>FLTP</a:t>
+              <a:t>DEC</a:t>
+            </a:r>
+            <a:r>
+              <a:rPr lang="en-US" sz="950" dirty="0">
+                <a:solidFill>
+                  <a:srgbClr val="CCCCCC"/>
+                </a:solidFill>
+                <a:latin typeface="Courier New" pitchFamily="34" charset="0"/>
+                <a:ea typeface="Courier New" pitchFamily="34" charset="-122"/>
+                <a:cs typeface="Courier New" pitchFamily="34" charset="-120"/>
+              </a:rPr>
+              <a:t>(</a:t>
             </a:r>
             <a:r>
               <a:rPr lang="en-US" sz="950" dirty="0">
@@ -15284,6 +15301,61 @@
             <a:r>
               <a:rPr lang="en-US" sz="950" dirty="0">
                 <a:solidFill>
+                  <a:srgbClr val="B5CEA8"/>
+                </a:solidFill>
+                <a:latin typeface="Courier New" pitchFamily="34" charset="0"/>
+                <a:ea typeface="Courier New" pitchFamily="34" charset="-122"/>
+                <a:cs typeface="Courier New" pitchFamily="34" charset="-120"/>
+              </a:rPr>
+              <a:t>15</a:t>
+            </a:r>
+            <a:r>
+              <a:rPr lang="en-US" sz="950" dirty="0">
+                <a:solidFill>
+                  <a:srgbClr val="CCCCCC"/>
+                </a:solidFill>
+                <a:latin typeface="Courier New" pitchFamily="34" charset="0"/>
+                <a:ea typeface="Courier New" pitchFamily="34" charset="-122"/>
+                <a:cs typeface="Courier New" pitchFamily="34" charset="-120"/>
+              </a:rPr>
+              <a:t>,</a:t>
+            </a:r>
+            <a:r>
+              <a:rPr lang="en-US" sz="950" dirty="0">
+                <a:solidFill>
+                  <a:srgbClr val="CCCCCC"/>
+                </a:solidFill>
+                <a:latin typeface="Courier New" pitchFamily="34" charset="0"/>
+                <a:ea typeface="Courier New" pitchFamily="34" charset="-122"/>
+                <a:cs typeface="Courier New" pitchFamily="34" charset="-120"/>
+              </a:rPr>
+              <a:t> </a:t>
+            </a:r>
+            <a:r>
+              <a:rPr lang="en-US" sz="950" dirty="0">
+                <a:solidFill>
+                  <a:srgbClr val="B5CEA8"/>
+                </a:solidFill>
+                <a:latin typeface="Courier New" pitchFamily="34" charset="0"/>
+                <a:ea typeface="Courier New" pitchFamily="34" charset="-122"/>
+                <a:cs typeface="Courier New" pitchFamily="34" charset="-120"/>
+              </a:rPr>
+              <a:t>2</a:t>
+            </a:r>
+            <a:r>
+              <a:rPr lang="en-US" sz="950" dirty="0">
+                <a:solidFill>
+                  <a:srgbClr val="CCCCCC"/>
+                </a:solidFill>
+                <a:latin typeface="Courier New" pitchFamily="34" charset="0"/>
+                <a:ea typeface="Courier New" pitchFamily="34" charset="-122"/>
+                <a:cs typeface="Courier New" pitchFamily="34" charset="-120"/>
+              </a:rPr>
+              <a:t> </a:t>
+            </a:r>
+            <a:r>
+              <a:rPr lang="en-US" sz="950" dirty="0">
+                <a:solidFill>
                   <a:srgbClr val="CCCCCC"/>
                 </a:solidFill>
                 <a:latin typeface="Courier New" pitchFamily="34" charset="0"/>
@@ -15312,6 +15384,28 @@
                 <a:ea typeface="Courier New" pitchFamily="34" charset="-122"/>
                 <a:cs typeface="Courier New" pitchFamily="34" charset="-120"/>
               </a:rPr>
+              <a:t>)</a:t>
+            </a:r>
+            <a:r>
+              <a:rPr lang="en-US" sz="950" dirty="0">
+                <a:solidFill>
+                  <a:srgbClr val="CCCCCC"/>
+                </a:solidFill>
+                <a:latin typeface="Courier New" pitchFamily="34" charset="0"/>
+                <a:ea typeface="Courier New" pitchFamily="34" charset="-122"/>
+                <a:cs typeface="Courier New" pitchFamily="34" charset="-120"/>
+              </a:rPr>
+              <a:t> </a:t>
+            </a:r>
+            <a:r>
+              <a:rPr lang="en-US" sz="950" dirty="0">
+                <a:solidFill>
+                  <a:srgbClr val="CCCCCC"/>
+                </a:solidFill>
+                <a:latin typeface="Courier New" pitchFamily="34" charset="0"/>
+                <a:ea typeface="Courier New" pitchFamily="34" charset="-122"/>
+                <a:cs typeface="Courier New" pitchFamily="34" charset="-120"/>
+              </a:rPr>
               <a:t>*</a:t>
             </a:r>
             <a:r>
@@ -15328,112 +15422,13 @@
             <a:r>
               <a:rPr lang="en-US" sz="950" dirty="0">
                 <a:solidFill>
-                  <a:srgbClr val="569CD6"/>
-                </a:solidFill>
-                <a:latin typeface="Courier New" pitchFamily="34" charset="0"/>
-                <a:ea typeface="Courier New" pitchFamily="34" charset="-122"/>
-                <a:cs typeface="Courier New" pitchFamily="34" charset="-120"/>
-              </a:rPr>
-              <a:t>CAST</a:t>
-            </a:r>
-            <a:r>
-              <a:rPr lang="en-US" sz="950" dirty="0">
-                <a:solidFill>
-                  <a:srgbClr val="CCCCCC"/>
-                </a:solidFill>
-                <a:latin typeface="Courier New" pitchFamily="34" charset="0"/>
-                <a:ea typeface="Courier New" pitchFamily="34" charset="-122"/>
-                <a:cs typeface="Courier New" pitchFamily="34" charset="-120"/>
-              </a:rPr>
-              <a:t>(</a:t>
-            </a:r>
-            <a:r>
-              <a:rPr lang="en-US" sz="950" dirty="0">
-                <a:solidFill>
-                  <a:srgbClr val="CCCCCC"/>
-                </a:solidFill>
-                <a:latin typeface="Courier New" pitchFamily="34" charset="0"/>
-                <a:ea typeface="Courier New" pitchFamily="34" charset="-122"/>
-                <a:cs typeface="Courier New" pitchFamily="34" charset="-120"/>
-              </a:rPr>
-              <a:t> </a:t>
-            </a:r>
-            <a:r>
-              <a:rPr lang="en-US" sz="950" dirty="0">
-                <a:solidFill>
-                  <a:srgbClr val="B5CEA8"/>
-                </a:solidFill>
-                <a:latin typeface="Courier New" pitchFamily="34" charset="0"/>
-                <a:ea typeface="Courier New" pitchFamily="34" charset="-122"/>
-                <a:cs typeface="Courier New" pitchFamily="34" charset="-120"/>
-              </a:rPr>
-              <a:t>100</a:t>
-            </a:r>
-            <a:r>
-              <a:rPr lang="en-US" sz="950" dirty="0">
-                <a:solidFill>
-                  <a:srgbClr val="CCCCCC"/>
-                </a:solidFill>
-                <a:latin typeface="Courier New" pitchFamily="34" charset="0"/>
-                <a:ea typeface="Courier New" pitchFamily="34" charset="-122"/>
-                <a:cs typeface="Courier New" pitchFamily="34" charset="-120"/>
-              </a:rPr>
-              <a:t> </a:t>
-            </a:r>
-            <a:r>
-              <a:rPr lang="en-US" sz="950" dirty="0">
-                <a:solidFill>
-                  <a:srgbClr val="569CD6"/>
-                </a:solidFill>
-                <a:latin typeface="Courier New" pitchFamily="34" charset="0"/>
-                <a:ea typeface="Courier New" pitchFamily="34" charset="-122"/>
-                <a:cs typeface="Courier New" pitchFamily="34" charset="-120"/>
-              </a:rPr>
-              <a:t>AS</a:t>
-            </a:r>
-            <a:r>
-              <a:rPr lang="en-US" sz="950" dirty="0">
-                <a:solidFill>
-                  <a:srgbClr val="CCCCCC"/>
-                </a:solidFill>
-                <a:latin typeface="Courier New" pitchFamily="34" charset="0"/>
-                <a:ea typeface="Courier New" pitchFamily="34" charset="-122"/>
-                <a:cs typeface="Courier New" pitchFamily="34" charset="-120"/>
-              </a:rPr>
-              <a:t> </a:t>
-            </a:r>
-            <a:r>
-              <a:rPr lang="en-US" sz="950" dirty="0">
-                <a:solidFill>
-                  <a:srgbClr val="CCCCCC"/>
-                </a:solidFill>
-                <a:latin typeface="Courier New" pitchFamily="34" charset="0"/>
-                <a:ea typeface="Courier New" pitchFamily="34" charset="-122"/>
-                <a:cs typeface="Courier New" pitchFamily="34" charset="-120"/>
-              </a:rPr>
-              <a:t>FLTP</a:t>
-            </a:r>
-            <a:r>
-              <a:rPr lang="en-US" sz="950" dirty="0">
-                <a:solidFill>
-                  <a:srgbClr val="CCCCCC"/>
-                </a:solidFill>
-                <a:latin typeface="Courier New" pitchFamily="34" charset="0"/>
-                <a:ea typeface="Courier New" pitchFamily="34" charset="-122"/>
-                <a:cs typeface="Courier New" pitchFamily="34" charset="-120"/>
-              </a:rPr>
-              <a:t> </a:t>
-            </a:r>
-            <a:r>
-              <a:rPr lang="en-US" sz="950" dirty="0">
-                <a:solidFill>
-                  <a:srgbClr val="CCCCCC"/>
-                </a:solidFill>
-                <a:latin typeface="Courier New" pitchFamily="34" charset="0"/>
-                <a:ea typeface="Courier New" pitchFamily="34" charset="-122"/>
-                <a:cs typeface="Courier New" pitchFamily="34" charset="-120"/>
-              </a:rPr>
-              <a:t>)</a:t>
+                  <a:srgbClr val="CCCCCC"/>
+                </a:solidFill>
+                <a:latin typeface="Courier New" pitchFamily="34" charset="0"/>
+                <a:ea typeface="Courier New" pitchFamily="34" charset="-122"/>
+                <a:cs typeface="Courier New" pitchFamily="34" charset="-120"/>
+              </a:rPr>
+              <a:t>qtde_estoque</a:t>
             </a:r>
             <a:endParaRPr lang="en-US" sz="950" dirty="0"/>
           </a:p>
@@ -15453,18 +15448,18 @@
                 <a:ea typeface="Courier New" pitchFamily="34" charset="-122"/>
                 <a:cs typeface="Courier New" pitchFamily="34" charset="-120"/>
               </a:rPr>
-              <a:t>           </a:t>
-            </a:r>
-            <a:r>
-              <a:rPr lang="en-US" sz="950" dirty="0">
-                <a:solidFill>
-                  <a:srgbClr val="CCCCCC"/>
-                </a:solidFill>
-                <a:latin typeface="Courier New" pitchFamily="34" charset="0"/>
-                <a:ea typeface="Courier New" pitchFamily="34" charset="-122"/>
-                <a:cs typeface="Courier New" pitchFamily="34" charset="-120"/>
-              </a:rPr>
-              <a:t>/</a:t>
+              <a:t>                                                       </a:t>
+            </a:r>
+            <a:r>
+              <a:rPr lang="en-US" sz="950" dirty="0">
+                <a:solidFill>
+                  <a:srgbClr val="569CD6"/>
+                </a:solidFill>
+                <a:latin typeface="Courier New" pitchFamily="34" charset="0"/>
+                <a:ea typeface="Courier New" pitchFamily="34" charset="-122"/>
+                <a:cs typeface="Courier New" pitchFamily="34" charset="-120"/>
+              </a:rPr>
+              <a:t>AS</a:t>
             </a:r>
             <a:r>
               <a:rPr lang="en-US" sz="950" dirty="0">
@@ -15480,156 +15475,13 @@
             <a:r>
               <a:rPr lang="en-US" sz="950" dirty="0">
                 <a:solidFill>
-                  <a:srgbClr val="569CD6"/>
-                </a:solidFill>
-                <a:latin typeface="Courier New" pitchFamily="34" charset="0"/>
-                <a:ea typeface="Courier New" pitchFamily="34" charset="-122"/>
-                <a:cs typeface="Courier New" pitchFamily="34" charset="-120"/>
-              </a:rPr>
-              <a:t>CAST</a:t>
-            </a:r>
-            <a:r>
-              <a:rPr lang="en-US" sz="950" dirty="0">
-                <a:solidFill>
-                  <a:srgbClr val="CCCCCC"/>
-                </a:solidFill>
-                <a:latin typeface="Courier New" pitchFamily="34" charset="0"/>
-                <a:ea typeface="Courier New" pitchFamily="34" charset="-122"/>
-                <a:cs typeface="Courier New" pitchFamily="34" charset="-120"/>
-              </a:rPr>
-              <a:t>(</a:t>
-            </a:r>
-            <a:r>
-              <a:rPr lang="en-US" sz="950" dirty="0">
-                <a:solidFill>
-                  <a:srgbClr val="CCCCCC"/>
-                </a:solidFill>
-                <a:latin typeface="Courier New" pitchFamily="34" charset="0"/>
-                <a:ea typeface="Courier New" pitchFamily="34" charset="-122"/>
-                <a:cs typeface="Courier New" pitchFamily="34" charset="-120"/>
-              </a:rPr>
-              <a:t> </a:t>
-            </a:r>
-            <a:r>
-              <a:rPr lang="en-US" sz="950" dirty="0">
-                <a:solidFill>
-                  <a:srgbClr val="CCCCCC"/>
-                </a:solidFill>
-                <a:latin typeface="Courier New" pitchFamily="34" charset="0"/>
-                <a:ea typeface="Courier New" pitchFamily="34" charset="-122"/>
-                <a:cs typeface="Courier New" pitchFamily="34" charset="-120"/>
-              </a:rPr>
-              <a:t>seats_max</a:t>
-            </a:r>
-            <a:r>
-              <a:rPr lang="en-US" sz="950" dirty="0">
-                <a:solidFill>
-                  <a:srgbClr val="CCCCCC"/>
-                </a:solidFill>
-                <a:latin typeface="Courier New" pitchFamily="34" charset="0"/>
-                <a:ea typeface="Courier New" pitchFamily="34" charset="-122"/>
-                <a:cs typeface="Courier New" pitchFamily="34" charset="-120"/>
-              </a:rPr>
-              <a:t> </a:t>
-            </a:r>
-            <a:r>
-              <a:rPr lang="en-US" sz="950" dirty="0">
-                <a:solidFill>
-                  <a:srgbClr val="569CD6"/>
-                </a:solidFill>
-                <a:latin typeface="Courier New" pitchFamily="34" charset="0"/>
-                <a:ea typeface="Courier New" pitchFamily="34" charset="-122"/>
-                <a:cs typeface="Courier New" pitchFamily="34" charset="-120"/>
-              </a:rPr>
-              <a:t>AS</a:t>
-            </a:r>
-            <a:r>
-              <a:rPr lang="en-US" sz="950" dirty="0">
-                <a:solidFill>
-                  <a:srgbClr val="CCCCCC"/>
-                </a:solidFill>
-                <a:latin typeface="Courier New" pitchFamily="34" charset="0"/>
-                <a:ea typeface="Courier New" pitchFamily="34" charset="-122"/>
-                <a:cs typeface="Courier New" pitchFamily="34" charset="-120"/>
-              </a:rPr>
-              <a:t> </a:t>
-            </a:r>
-            <a:r>
-              <a:rPr lang="en-US" sz="950" dirty="0">
-                <a:solidFill>
-                  <a:srgbClr val="CCCCCC"/>
-                </a:solidFill>
-                <a:latin typeface="Courier New" pitchFamily="34" charset="0"/>
-                <a:ea typeface="Courier New" pitchFamily="34" charset="-122"/>
-                <a:cs typeface="Courier New" pitchFamily="34" charset="-120"/>
-              </a:rPr>
-              <a:t>FLTP</a:t>
-            </a:r>
-            <a:r>
-              <a:rPr lang="en-US" sz="950" dirty="0">
-                <a:solidFill>
-                  <a:srgbClr val="CCCCCC"/>
-                </a:solidFill>
-                <a:latin typeface="Courier New" pitchFamily="34" charset="0"/>
-                <a:ea typeface="Courier New" pitchFamily="34" charset="-122"/>
-                <a:cs typeface="Courier New" pitchFamily="34" charset="-120"/>
-              </a:rPr>
-              <a:t> </a:t>
-            </a:r>
-            <a:r>
-              <a:rPr lang="en-US" sz="950" dirty="0">
-                <a:solidFill>
-                  <a:srgbClr val="CCCCCC"/>
-                </a:solidFill>
-                <a:latin typeface="Courier New" pitchFamily="34" charset="0"/>
-                <a:ea typeface="Courier New" pitchFamily="34" charset="-122"/>
-                <a:cs typeface="Courier New" pitchFamily="34" charset="-120"/>
-              </a:rPr>
-              <a:t>)</a:t>
-            </a:r>
-            <a:r>
-              <a:rPr lang="en-US" sz="950" dirty="0">
-                <a:solidFill>
-                  <a:srgbClr val="CCCCCC"/>
-                </a:solidFill>
-                <a:latin typeface="Courier New" pitchFamily="34" charset="0"/>
-                <a:ea typeface="Courier New" pitchFamily="34" charset="-122"/>
-                <a:cs typeface="Courier New" pitchFamily="34" charset="-120"/>
-              </a:rPr>
-              <a:t>           </a:t>
-            </a:r>
-            <a:r>
-              <a:rPr lang="en-US" sz="950" dirty="0">
-                <a:solidFill>
-                  <a:srgbClr val="569CD6"/>
-                </a:solidFill>
-                <a:latin typeface="Courier New" pitchFamily="34" charset="0"/>
-                <a:ea typeface="Courier New" pitchFamily="34" charset="-122"/>
-                <a:cs typeface="Courier New" pitchFamily="34" charset="-120"/>
-              </a:rPr>
-              <a:t>AS</a:t>
-            </a:r>
-            <a:r>
-              <a:rPr lang="en-US" sz="950" dirty="0">
-                <a:solidFill>
-                  <a:srgbClr val="CCCCCC"/>
-                </a:solidFill>
-                <a:latin typeface="Courier New" pitchFamily="34" charset="0"/>
-                <a:ea typeface="Courier New" pitchFamily="34" charset="-122"/>
-                <a:cs typeface="Courier New" pitchFamily="34" charset="-120"/>
-              </a:rPr>
-              <a:t> </a:t>
-            </a:r>
-            <a:r>
-              <a:rPr lang="en-US" sz="950" dirty="0">
-                <a:solidFill>
-                  <a:srgbClr val="CCCCCC"/>
-                </a:solidFill>
-                <a:latin typeface="Courier New" pitchFamily="34" charset="0"/>
-                <a:ea typeface="Courier New" pitchFamily="34" charset="-122"/>
-                <a:cs typeface="Courier New" pitchFamily="34" charset="-120"/>
-              </a:rPr>
-              <a:t>pct_fltp</a:t>
+                  <a:srgbClr val="CCCCCC"/>
+                </a:solidFill>
+                <a:latin typeface="Courier New" pitchFamily="34" charset="0"/>
+                <a:ea typeface="Courier New" pitchFamily="34" charset="-122"/>
+                <a:cs typeface="Courier New" pitchFamily="34" charset="-120"/>
+              </a:rPr>
+              <a:t>valor_estoque</a:t>
             </a:r>
             <a:r>
               <a:rPr lang="en-US" sz="950" dirty="0">
@@ -15671,7 +15523,7 @@
                 <a:ea typeface="Courier New" pitchFamily="34" charset="-122"/>
                 <a:cs typeface="Courier New" pitchFamily="34" charset="-120"/>
               </a:rPr>
-              <a:t>carrier_id</a:t>
+              <a:t>categoria</a:t>
             </a:r>
             <a:r>
               <a:rPr lang="en-US" sz="950" dirty="0">
@@ -15726,7 +15578,7 @@
                 <a:ea typeface="Courier New" pitchFamily="34" charset="-122"/>
                 <a:cs typeface="Courier New" pitchFamily="34" charset="-120"/>
               </a:rPr>
-              <a:t>'-'</a:t>
+              <a:t>'/'</a:t>
             </a:r>
             <a:r>
               <a:rPr lang="en-US" sz="950" dirty="0">
@@ -15781,18 +15633,18 @@
                 <a:ea typeface="Courier New" pitchFamily="34" charset="-122"/>
                 <a:cs typeface="Courier New" pitchFamily="34" charset="-120"/>
               </a:rPr>
-              <a:t>connection_id</a:t>
-            </a:r>
-            <a:r>
-              <a:rPr lang="en-US" sz="950" dirty="0">
-                <a:solidFill>
-                  <a:srgbClr val="CCCCCC"/>
-                </a:solidFill>
-                <a:latin typeface="Courier New" pitchFamily="34" charset="0"/>
-                <a:ea typeface="Courier New" pitchFamily="34" charset="-122"/>
-                <a:cs typeface="Courier New" pitchFamily="34" charset="-120"/>
-              </a:rPr>
-              <a:t>      </a:t>
+              <a:t>sku</a:t>
+            </a:r>
+            <a:r>
+              <a:rPr lang="en-US" sz="950" dirty="0">
+                <a:solidFill>
+                  <a:srgbClr val="CCCCCC"/>
+                </a:solidFill>
+                <a:latin typeface="Courier New" pitchFamily="34" charset="0"/>
+                <a:ea typeface="Courier New" pitchFamily="34" charset="-122"/>
+                <a:cs typeface="Courier New" pitchFamily="34" charset="-120"/>
+              </a:rPr>
+              <a:t>                       </a:t>
             </a:r>
             <a:r>
               <a:rPr lang="en-US" sz="950" dirty="0">
@@ -15825,7 +15677,7 @@
                 <a:ea typeface="Courier New" pitchFamily="34" charset="-122"/>
                 <a:cs typeface="Courier New" pitchFamily="34" charset="-120"/>
               </a:rPr>
-              <a:t>flight_code</a:t>
+              <a:t>rotulo</a:t>
             </a:r>
             <a:r>
               <a:rPr lang="en-US" sz="950" dirty="0">
@@ -15911,7 +15763,7 @@
                 <a:ea typeface="Courier New" pitchFamily="34" charset="-122"/>
                 <a:cs typeface="Courier New" pitchFamily="34" charset="-120"/>
               </a:rPr>
-              <a:t>seats_occupied</a:t>
+              <a:t>qtde_reservada</a:t>
             </a:r>
             <a:r>
               <a:rPr lang="en-US" sz="950" dirty="0">
@@ -15966,7 +15818,7 @@
                 <a:ea typeface="Courier New" pitchFamily="34" charset="-122"/>
                 <a:cs typeface="Courier New" pitchFamily="34" charset="-120"/>
               </a:rPr>
-              <a:t>seats_max</a:t>
+              <a:t>qtde_estoque</a:t>
             </a:r>
             <a:r>
               <a:rPr lang="en-US" sz="950" dirty="0">
@@ -16096,7 +15948,7 @@
                 <a:ea typeface="Courier New" pitchFamily="34" charset="-122"/>
                 <a:cs typeface="Courier New" pitchFamily="34" charset="-120"/>
               </a:rPr>
-              <a:t>                       </a:t>
+              <a:t>                             </a:t>
             </a:r>
             <a:r>
               <a:rPr lang="en-US" sz="950" dirty="0">
@@ -16129,7 +15981,7 @@
                 <a:ea typeface="Courier New" pitchFamily="34" charset="-122"/>
                 <a:cs typeface="Courier New" pitchFamily="34" charset="-120"/>
               </a:rPr>
-              <a:t>is_full</a:t>
+              <a:t>esgotado</a:t>
             </a:r>
             <a:endParaRPr lang="en-US" sz="950" dirty="0"/>
           </a:p>
@@ -16160,6 +16012,103 @@
                 <a:ea typeface="Courier New" pitchFamily="34" charset="-122"/>
                 <a:cs typeface="Courier New" pitchFamily="34" charset="-120"/>
               </a:rPr>
+              <a:t>WHERE</a:t>
+            </a:r>
+            <a:r>
+              <a:rPr lang="en-US" sz="950" dirty="0">
+                <a:solidFill>
+                  <a:srgbClr val="CCCCCC"/>
+                </a:solidFill>
+                <a:latin typeface="Courier New" pitchFamily="34" charset="0"/>
+                <a:ea typeface="Courier New" pitchFamily="34" charset="-122"/>
+                <a:cs typeface="Courier New" pitchFamily="34" charset="-120"/>
+              </a:rPr>
+              <a:t> </a:t>
+            </a:r>
+            <a:r>
+              <a:rPr lang="en-US" sz="950" dirty="0">
+                <a:solidFill>
+                  <a:srgbClr val="CCCCCC"/>
+                </a:solidFill>
+                <a:latin typeface="Courier New" pitchFamily="34" charset="0"/>
+                <a:ea typeface="Courier New" pitchFamily="34" charset="-122"/>
+                <a:cs typeface="Courier New" pitchFamily="34" charset="-120"/>
+              </a:rPr>
+              <a:t>qtde_estoque</a:t>
+            </a:r>
+            <a:r>
+              <a:rPr lang="en-US" sz="950" dirty="0">
+                <a:solidFill>
+                  <a:srgbClr val="CCCCCC"/>
+                </a:solidFill>
+                <a:latin typeface="Courier New" pitchFamily="34" charset="0"/>
+                <a:ea typeface="Courier New" pitchFamily="34" charset="-122"/>
+                <a:cs typeface="Courier New" pitchFamily="34" charset="-120"/>
+              </a:rPr>
+              <a:t> </a:t>
+            </a:r>
+            <a:r>
+              <a:rPr lang="en-US" sz="950" dirty="0">
+                <a:solidFill>
+                  <a:srgbClr val="CCCCCC"/>
+                </a:solidFill>
+                <a:latin typeface="Courier New" pitchFamily="34" charset="0"/>
+                <a:ea typeface="Courier New" pitchFamily="34" charset="-122"/>
+                <a:cs typeface="Courier New" pitchFamily="34" charset="-120"/>
+              </a:rPr>
+              <a:t>&gt;</a:t>
+            </a:r>
+            <a:r>
+              <a:rPr lang="en-US" sz="950" dirty="0">
+                <a:solidFill>
+                  <a:srgbClr val="CCCCCC"/>
+                </a:solidFill>
+                <a:latin typeface="Courier New" pitchFamily="34" charset="0"/>
+                <a:ea typeface="Courier New" pitchFamily="34" charset="-122"/>
+                <a:cs typeface="Courier New" pitchFamily="34" charset="-120"/>
+              </a:rPr>
+              <a:t> </a:t>
+            </a:r>
+            <a:r>
+              <a:rPr lang="en-US" sz="950" dirty="0">
+                <a:solidFill>
+                  <a:srgbClr val="B5CEA8"/>
+                </a:solidFill>
+                <a:latin typeface="Courier New" pitchFamily="34" charset="0"/>
+                <a:ea typeface="Courier New" pitchFamily="34" charset="-122"/>
+                <a:cs typeface="Courier New" pitchFamily="34" charset="-120"/>
+              </a:rPr>
+              <a:t>0</a:t>
+            </a:r>
+            <a:endParaRPr lang="en-US" sz="950" dirty="0"/>
+          </a:p>
+          <a:p>
+            <a:pPr indent="0" marL="0">
+              <a:lnSpc>
+                <a:spcPct val="105000"/>
+              </a:lnSpc>
+              <a:buNone/>
+            </a:pPr>
+            <a:r>
+              <a:rPr lang="en-US" sz="950" dirty="0">
+                <a:solidFill>
+                  <a:srgbClr val="CCCCCC"/>
+                </a:solidFill>
+                <a:latin typeface="Courier New" pitchFamily="34" charset="0"/>
+                <a:ea typeface="Courier New" pitchFamily="34" charset="-122"/>
+                <a:cs typeface="Courier New" pitchFamily="34" charset="-120"/>
+              </a:rPr>
+              <a:t>  </a:t>
+            </a:r>
+            <a:r>
+              <a:rPr lang="en-US" sz="950" dirty="0">
+                <a:solidFill>
+                  <a:srgbClr val="569CD6"/>
+                </a:solidFill>
+                <a:latin typeface="Courier New" pitchFamily="34" charset="0"/>
+                <a:ea typeface="Courier New" pitchFamily="34" charset="-122"/>
+                <a:cs typeface="Courier New" pitchFamily="34" charset="-120"/>
+              </a:rPr>
               <a:t>INTO</a:t>
             </a:r>
             <a:r>
@@ -16237,7 +16186,7 @@
                 <a:ea typeface="Courier New" pitchFamily="34" charset="-122"/>
                 <a:cs typeface="Courier New" pitchFamily="34" charset="-120"/>
               </a:rPr>
-              <a:t>flights</a:t>
+              <a:t>itens</a:t>
             </a:r>
             <a:r>
               <a:rPr lang="en-US" sz="950" dirty="0">
@@ -16677,7 +16626,26 @@
                   <a:srgbClr val="556B82"/>
                 </a:solidFill>
               </a:rPr>
-              <a:t>Inteira corta o resto (48); decimal arredonda (48.79).</a:t>
+              <a:t>Inteira corta o resto; decimal arredonda para as casas pedidas. O </a:t>
+            </a:r>
+            <a:r>
+              <a:rPr lang="en-US" sz="1050" dirty="0">
+                <a:solidFill>
+                  <a:srgbClr val="0064D9"/>
+                </a:solidFill>
+                <a:latin typeface="Courier New" pitchFamily="34" charset="0"/>
+                <a:ea typeface="Courier New" pitchFamily="34" charset="-122"/>
+                <a:cs typeface="Courier New" pitchFamily="34" charset="-120"/>
+              </a:rPr>
+              <a:t>WHERE</a:t>
+            </a:r>
+            <a:r>
+              <a:rPr lang="en-US" sz="1050" dirty="0">
+                <a:solidFill>
+                  <a:srgbClr val="556B82"/>
+                </a:solidFill>
+              </a:rPr>
+              <a:t> evita dividir por zero.</a:t>
             </a:r>
             <a:endParaRPr lang="en-US" sz="1400" dirty="0"/>
           </a:p>
